--- a/ゲーム科2年/00_前期/ゲーム開発Ⅰ/ゲーム物理学/座学/04_速度.pptx
+++ b/ゲーム科2年/00_前期/ゲーム開発Ⅰ/ゲーム物理学/座学/04_速度.pptx
@@ -264,7 +264,7 @@
           <a:p>
             <a:fld id="{E9CC885B-4903-4D54-9A93-00025F12DED9}" type="datetimeFigureOut">
               <a:rPr kumimoji="1" lang="ja-JP" altLang="en-US" smtClean="0"/>
-              <a:t>2024/11/21</a:t>
+              <a:t>2025/4/9</a:t>
             </a:fld>
             <a:endParaRPr kumimoji="1" lang="ja-JP" altLang="en-US"/>
           </a:p>
@@ -494,7 +494,7 @@
           <a:p>
             <a:fld id="{E9CC885B-4903-4D54-9A93-00025F12DED9}" type="datetimeFigureOut">
               <a:rPr kumimoji="1" lang="ja-JP" altLang="en-US" smtClean="0"/>
-              <a:t>2024/11/21</a:t>
+              <a:t>2025/4/9</a:t>
             </a:fld>
             <a:endParaRPr kumimoji="1" lang="ja-JP" altLang="en-US"/>
           </a:p>
@@ -734,7 +734,7 @@
           <a:p>
             <a:fld id="{E9CC885B-4903-4D54-9A93-00025F12DED9}" type="datetimeFigureOut">
               <a:rPr kumimoji="1" lang="ja-JP" altLang="en-US" smtClean="0"/>
-              <a:t>2024/11/21</a:t>
+              <a:t>2025/4/9</a:t>
             </a:fld>
             <a:endParaRPr kumimoji="1" lang="ja-JP" altLang="en-US"/>
           </a:p>
@@ -964,7 +964,7 @@
           <a:p>
             <a:fld id="{E9CC885B-4903-4D54-9A93-00025F12DED9}" type="datetimeFigureOut">
               <a:rPr kumimoji="1" lang="ja-JP" altLang="en-US" smtClean="0"/>
-              <a:t>2024/11/21</a:t>
+              <a:t>2025/4/9</a:t>
             </a:fld>
             <a:endParaRPr kumimoji="1" lang="ja-JP" altLang="en-US"/>
           </a:p>
@@ -1239,7 +1239,7 @@
           <a:p>
             <a:fld id="{E9CC885B-4903-4D54-9A93-00025F12DED9}" type="datetimeFigureOut">
               <a:rPr kumimoji="1" lang="ja-JP" altLang="en-US" smtClean="0"/>
-              <a:t>2024/11/21</a:t>
+              <a:t>2025/4/9</a:t>
             </a:fld>
             <a:endParaRPr kumimoji="1" lang="ja-JP" altLang="en-US"/>
           </a:p>
@@ -1568,7 +1568,7 @@
           <a:p>
             <a:fld id="{E9CC885B-4903-4D54-9A93-00025F12DED9}" type="datetimeFigureOut">
               <a:rPr kumimoji="1" lang="ja-JP" altLang="en-US" smtClean="0"/>
-              <a:t>2024/11/21</a:t>
+              <a:t>2025/4/9</a:t>
             </a:fld>
             <a:endParaRPr kumimoji="1" lang="ja-JP" altLang="en-US"/>
           </a:p>
@@ -2044,7 +2044,7 @@
           <a:p>
             <a:fld id="{E9CC885B-4903-4D54-9A93-00025F12DED9}" type="datetimeFigureOut">
               <a:rPr kumimoji="1" lang="ja-JP" altLang="en-US" smtClean="0"/>
-              <a:t>2024/11/21</a:t>
+              <a:t>2025/4/9</a:t>
             </a:fld>
             <a:endParaRPr kumimoji="1" lang="ja-JP" altLang="en-US"/>
           </a:p>
@@ -2185,7 +2185,7 @@
           <a:p>
             <a:fld id="{E9CC885B-4903-4D54-9A93-00025F12DED9}" type="datetimeFigureOut">
               <a:rPr kumimoji="1" lang="ja-JP" altLang="en-US" smtClean="0"/>
-              <a:t>2024/11/21</a:t>
+              <a:t>2025/4/9</a:t>
             </a:fld>
             <a:endParaRPr kumimoji="1" lang="ja-JP" altLang="en-US"/>
           </a:p>
@@ -2298,7 +2298,7 @@
           <a:p>
             <a:fld id="{E9CC885B-4903-4D54-9A93-00025F12DED9}" type="datetimeFigureOut">
               <a:rPr kumimoji="1" lang="ja-JP" altLang="en-US" smtClean="0"/>
-              <a:t>2024/11/21</a:t>
+              <a:t>2025/4/9</a:t>
             </a:fld>
             <a:endParaRPr kumimoji="1" lang="ja-JP" altLang="en-US"/>
           </a:p>
@@ -2641,7 +2641,7 @@
           <a:p>
             <a:fld id="{E9CC885B-4903-4D54-9A93-00025F12DED9}" type="datetimeFigureOut">
               <a:rPr kumimoji="1" lang="ja-JP" altLang="en-US" smtClean="0"/>
-              <a:t>2024/11/21</a:t>
+              <a:t>2025/4/9</a:t>
             </a:fld>
             <a:endParaRPr kumimoji="1" lang="ja-JP" altLang="en-US"/>
           </a:p>
@@ -2929,7 +2929,7 @@
           <a:p>
             <a:fld id="{E9CC885B-4903-4D54-9A93-00025F12DED9}" type="datetimeFigureOut">
               <a:rPr kumimoji="1" lang="ja-JP" altLang="en-US" smtClean="0"/>
-              <a:t>2024/11/21</a:t>
+              <a:t>2025/4/9</a:t>
             </a:fld>
             <a:endParaRPr kumimoji="1" lang="ja-JP" altLang="en-US"/>
           </a:p>
@@ -3202,7 +3202,7 @@
           <a:p>
             <a:fld id="{E9CC885B-4903-4D54-9A93-00025F12DED9}" type="datetimeFigureOut">
               <a:rPr kumimoji="1" lang="ja-JP" altLang="en-US" smtClean="0"/>
-              <a:t>2024/11/21</a:t>
+              <a:t>2025/4/9</a:t>
             </a:fld>
             <a:endParaRPr kumimoji="1" lang="ja-JP" altLang="en-US"/>
           </a:p>
@@ -4118,7 +4118,7 @@
             <p:spPr>
               <a:xfrm>
                 <a:off x="4885543" y="3429000"/>
-                <a:ext cx="7043916" cy="2862002"/>
+                <a:ext cx="7043916" cy="2492670"/>
               </a:xfrm>
               <a:prstGeom prst="rect">
                 <a:avLst/>
@@ -4199,10 +4199,6 @@
               </a:p>
               <a:p>
                 <a:r>
-                  <a:rPr lang="en-US" altLang="ja-JP" sz="2400" dirty="0"/>
-                  <a:t>0</a:t>
-                </a:r>
-                <a:r>
                   <a:rPr lang="ja-JP" altLang="en-US" sz="2400" dirty="0"/>
                   <a:t>どの行をとっても</a:t>
                 </a:r>
@@ -4291,22 +4287,11 @@
                 </a14:m>
                 <a:r>
                   <a:rPr lang="ja-JP" altLang="en-US" sz="2400" dirty="0"/>
-                  <a:t>となります。</a:t>
-                </a:r>
-                <a:endParaRPr lang="en-US" altLang="ja-JP" sz="2400" dirty="0"/>
-              </a:p>
-              <a:p>
-                <a:r>
-                  <a:rPr lang="ja-JP" altLang="en-US" sz="2400" dirty="0"/>
-                  <a:t>（</a:t>
+                  <a:t>と</a:t>
                 </a:r>
                 <a:r>
-                  <a:rPr lang="en-US" altLang="ja-JP" sz="2400" dirty="0"/>
-                  <a:t>0</a:t>
-                </a:r>
-                <a:r>
-                  <a:rPr lang="ja-JP" altLang="en-US" sz="2400" dirty="0"/>
-                  <a:t>の行は止まっているので含めません）</a:t>
+                  <a:rPr lang="ja-JP" altLang="en-US" sz="2400"/>
+                  <a:t>なります。</a:t>
                 </a:r>
                 <a:endParaRPr lang="en-US" altLang="ja-JP" sz="2400" dirty="0"/>
               </a:p>
@@ -4331,7 +4316,7 @@
             <p:spPr>
               <a:xfrm>
                 <a:off x="4885543" y="3429000"/>
-                <a:ext cx="7043916" cy="2862002"/>
+                <a:ext cx="7043916" cy="2492670"/>
               </a:xfrm>
               <a:prstGeom prst="rect">
                 <a:avLst/>
@@ -4339,7 +4324,7 @@
               <a:blipFill>
                 <a:blip r:embed="rId3"/>
                 <a:stretch>
-                  <a:fillRect l="-1298" t="-1706" r="-346" b="-3838"/>
+                  <a:fillRect l="-1298" t="-1961" r="-346" b="-4657"/>
                 </a:stretch>
               </a:blipFill>
             </p:spPr>

--- a/ゲーム科2年/00_前期/ゲーム開発Ⅰ/ゲーム物理学/座学/04_速度.pptx
+++ b/ゲーム科2年/00_前期/ゲーム開発Ⅰ/ゲーム物理学/座学/04_速度.pptx
@@ -264,7 +264,7 @@
           <a:p>
             <a:fld id="{E9CC885B-4903-4D54-9A93-00025F12DED9}" type="datetimeFigureOut">
               <a:rPr kumimoji="1" lang="ja-JP" altLang="en-US" smtClean="0"/>
-              <a:t>2025/4/9</a:t>
+              <a:t>2025/7/28</a:t>
             </a:fld>
             <a:endParaRPr kumimoji="1" lang="ja-JP" altLang="en-US"/>
           </a:p>
@@ -494,7 +494,7 @@
           <a:p>
             <a:fld id="{E9CC885B-4903-4D54-9A93-00025F12DED9}" type="datetimeFigureOut">
               <a:rPr kumimoji="1" lang="ja-JP" altLang="en-US" smtClean="0"/>
-              <a:t>2025/4/9</a:t>
+              <a:t>2025/7/28</a:t>
             </a:fld>
             <a:endParaRPr kumimoji="1" lang="ja-JP" altLang="en-US"/>
           </a:p>
@@ -734,7 +734,7 @@
           <a:p>
             <a:fld id="{E9CC885B-4903-4D54-9A93-00025F12DED9}" type="datetimeFigureOut">
               <a:rPr kumimoji="1" lang="ja-JP" altLang="en-US" smtClean="0"/>
-              <a:t>2025/4/9</a:t>
+              <a:t>2025/7/28</a:t>
             </a:fld>
             <a:endParaRPr kumimoji="1" lang="ja-JP" altLang="en-US"/>
           </a:p>
@@ -964,7 +964,7 @@
           <a:p>
             <a:fld id="{E9CC885B-4903-4D54-9A93-00025F12DED9}" type="datetimeFigureOut">
               <a:rPr kumimoji="1" lang="ja-JP" altLang="en-US" smtClean="0"/>
-              <a:t>2025/4/9</a:t>
+              <a:t>2025/7/28</a:t>
             </a:fld>
             <a:endParaRPr kumimoji="1" lang="ja-JP" altLang="en-US"/>
           </a:p>
@@ -1239,7 +1239,7 @@
           <a:p>
             <a:fld id="{E9CC885B-4903-4D54-9A93-00025F12DED9}" type="datetimeFigureOut">
               <a:rPr kumimoji="1" lang="ja-JP" altLang="en-US" smtClean="0"/>
-              <a:t>2025/4/9</a:t>
+              <a:t>2025/7/28</a:t>
             </a:fld>
             <a:endParaRPr kumimoji="1" lang="ja-JP" altLang="en-US"/>
           </a:p>
@@ -1568,7 +1568,7 @@
           <a:p>
             <a:fld id="{E9CC885B-4903-4D54-9A93-00025F12DED9}" type="datetimeFigureOut">
               <a:rPr kumimoji="1" lang="ja-JP" altLang="en-US" smtClean="0"/>
-              <a:t>2025/4/9</a:t>
+              <a:t>2025/7/28</a:t>
             </a:fld>
             <a:endParaRPr kumimoji="1" lang="ja-JP" altLang="en-US"/>
           </a:p>
@@ -2044,7 +2044,7 @@
           <a:p>
             <a:fld id="{E9CC885B-4903-4D54-9A93-00025F12DED9}" type="datetimeFigureOut">
               <a:rPr kumimoji="1" lang="ja-JP" altLang="en-US" smtClean="0"/>
-              <a:t>2025/4/9</a:t>
+              <a:t>2025/7/28</a:t>
             </a:fld>
             <a:endParaRPr kumimoji="1" lang="ja-JP" altLang="en-US"/>
           </a:p>
@@ -2185,7 +2185,7 @@
           <a:p>
             <a:fld id="{E9CC885B-4903-4D54-9A93-00025F12DED9}" type="datetimeFigureOut">
               <a:rPr kumimoji="1" lang="ja-JP" altLang="en-US" smtClean="0"/>
-              <a:t>2025/4/9</a:t>
+              <a:t>2025/7/28</a:t>
             </a:fld>
             <a:endParaRPr kumimoji="1" lang="ja-JP" altLang="en-US"/>
           </a:p>
@@ -2298,7 +2298,7 @@
           <a:p>
             <a:fld id="{E9CC885B-4903-4D54-9A93-00025F12DED9}" type="datetimeFigureOut">
               <a:rPr kumimoji="1" lang="ja-JP" altLang="en-US" smtClean="0"/>
-              <a:t>2025/4/9</a:t>
+              <a:t>2025/7/28</a:t>
             </a:fld>
             <a:endParaRPr kumimoji="1" lang="ja-JP" altLang="en-US"/>
           </a:p>
@@ -2641,7 +2641,7 @@
           <a:p>
             <a:fld id="{E9CC885B-4903-4D54-9A93-00025F12DED9}" type="datetimeFigureOut">
               <a:rPr kumimoji="1" lang="ja-JP" altLang="en-US" smtClean="0"/>
-              <a:t>2025/4/9</a:t>
+              <a:t>2025/7/28</a:t>
             </a:fld>
             <a:endParaRPr kumimoji="1" lang="ja-JP" altLang="en-US"/>
           </a:p>
@@ -2929,7 +2929,7 @@
           <a:p>
             <a:fld id="{E9CC885B-4903-4D54-9A93-00025F12DED9}" type="datetimeFigureOut">
               <a:rPr kumimoji="1" lang="ja-JP" altLang="en-US" smtClean="0"/>
-              <a:t>2025/4/9</a:t>
+              <a:t>2025/7/28</a:t>
             </a:fld>
             <a:endParaRPr kumimoji="1" lang="ja-JP" altLang="en-US"/>
           </a:p>
@@ -3202,7 +3202,7 @@
           <a:p>
             <a:fld id="{E9CC885B-4903-4D54-9A93-00025F12DED9}" type="datetimeFigureOut">
               <a:rPr kumimoji="1" lang="ja-JP" altLang="en-US" smtClean="0"/>
-              <a:t>2025/4/9</a:t>
+              <a:t>2025/7/28</a:t>
             </a:fld>
             <a:endParaRPr kumimoji="1" lang="ja-JP" altLang="en-US"/>
           </a:p>
@@ -4101,8 +4101,8 @@
           </a:graphicData>
         </a:graphic>
       </p:graphicFrame>
-      <mc:AlternateContent xmlns:mc="http://schemas.openxmlformats.org/markup-compatibility/2006">
-        <mc:Choice xmlns:a14="http://schemas.microsoft.com/office/drawing/2010/main" Requires="a14">
+      <mc:AlternateContent xmlns:mc="http://schemas.openxmlformats.org/markup-compatibility/2006" xmlns:a14="http://schemas.microsoft.com/office/drawing/2010/main">
+        <mc:Choice Requires="a14">
           <p:sp>
             <p:nvSpPr>
               <p:cNvPr id="5" name="テキスト ボックス 4">
@@ -4298,7 +4298,7 @@
             </p:txBody>
           </p:sp>
         </mc:Choice>
-        <mc:Fallback>
+        <mc:Fallback xmlns="">
           <p:sp>
             <p:nvSpPr>
               <p:cNvPr id="5" name="テキスト ボックス 4">

--- a/ゲーム科2年/00_前期/ゲーム開発Ⅰ/ゲーム物理学/座学/04_速度.pptx
+++ b/ゲーム科2年/00_前期/ゲーム開発Ⅰ/ゲーム物理学/座学/04_速度.pptx
@@ -264,7 +264,7 @@
           <a:p>
             <a:fld id="{E9CC885B-4903-4D54-9A93-00025F12DED9}" type="datetimeFigureOut">
               <a:rPr kumimoji="1" lang="ja-JP" altLang="en-US" smtClean="0"/>
-              <a:t>2025/7/28</a:t>
+              <a:t>2025/9/8</a:t>
             </a:fld>
             <a:endParaRPr kumimoji="1" lang="ja-JP" altLang="en-US"/>
           </a:p>
@@ -494,7 +494,7 @@
           <a:p>
             <a:fld id="{E9CC885B-4903-4D54-9A93-00025F12DED9}" type="datetimeFigureOut">
               <a:rPr kumimoji="1" lang="ja-JP" altLang="en-US" smtClean="0"/>
-              <a:t>2025/7/28</a:t>
+              <a:t>2025/9/8</a:t>
             </a:fld>
             <a:endParaRPr kumimoji="1" lang="ja-JP" altLang="en-US"/>
           </a:p>
@@ -734,7 +734,7 @@
           <a:p>
             <a:fld id="{E9CC885B-4903-4D54-9A93-00025F12DED9}" type="datetimeFigureOut">
               <a:rPr kumimoji="1" lang="ja-JP" altLang="en-US" smtClean="0"/>
-              <a:t>2025/7/28</a:t>
+              <a:t>2025/9/8</a:t>
             </a:fld>
             <a:endParaRPr kumimoji="1" lang="ja-JP" altLang="en-US"/>
           </a:p>
@@ -964,7 +964,7 @@
           <a:p>
             <a:fld id="{E9CC885B-4903-4D54-9A93-00025F12DED9}" type="datetimeFigureOut">
               <a:rPr kumimoji="1" lang="ja-JP" altLang="en-US" smtClean="0"/>
-              <a:t>2025/7/28</a:t>
+              <a:t>2025/9/8</a:t>
             </a:fld>
             <a:endParaRPr kumimoji="1" lang="ja-JP" altLang="en-US"/>
           </a:p>
@@ -1239,7 +1239,7 @@
           <a:p>
             <a:fld id="{E9CC885B-4903-4D54-9A93-00025F12DED9}" type="datetimeFigureOut">
               <a:rPr kumimoji="1" lang="ja-JP" altLang="en-US" smtClean="0"/>
-              <a:t>2025/7/28</a:t>
+              <a:t>2025/9/8</a:t>
             </a:fld>
             <a:endParaRPr kumimoji="1" lang="ja-JP" altLang="en-US"/>
           </a:p>
@@ -1568,7 +1568,7 @@
           <a:p>
             <a:fld id="{E9CC885B-4903-4D54-9A93-00025F12DED9}" type="datetimeFigureOut">
               <a:rPr kumimoji="1" lang="ja-JP" altLang="en-US" smtClean="0"/>
-              <a:t>2025/7/28</a:t>
+              <a:t>2025/9/8</a:t>
             </a:fld>
             <a:endParaRPr kumimoji="1" lang="ja-JP" altLang="en-US"/>
           </a:p>
@@ -2044,7 +2044,7 @@
           <a:p>
             <a:fld id="{E9CC885B-4903-4D54-9A93-00025F12DED9}" type="datetimeFigureOut">
               <a:rPr kumimoji="1" lang="ja-JP" altLang="en-US" smtClean="0"/>
-              <a:t>2025/7/28</a:t>
+              <a:t>2025/9/8</a:t>
             </a:fld>
             <a:endParaRPr kumimoji="1" lang="ja-JP" altLang="en-US"/>
           </a:p>
@@ -2185,7 +2185,7 @@
           <a:p>
             <a:fld id="{E9CC885B-4903-4D54-9A93-00025F12DED9}" type="datetimeFigureOut">
               <a:rPr kumimoji="1" lang="ja-JP" altLang="en-US" smtClean="0"/>
-              <a:t>2025/7/28</a:t>
+              <a:t>2025/9/8</a:t>
             </a:fld>
             <a:endParaRPr kumimoji="1" lang="ja-JP" altLang="en-US"/>
           </a:p>
@@ -2298,7 +2298,7 @@
           <a:p>
             <a:fld id="{E9CC885B-4903-4D54-9A93-00025F12DED9}" type="datetimeFigureOut">
               <a:rPr kumimoji="1" lang="ja-JP" altLang="en-US" smtClean="0"/>
-              <a:t>2025/7/28</a:t>
+              <a:t>2025/9/8</a:t>
             </a:fld>
             <a:endParaRPr kumimoji="1" lang="ja-JP" altLang="en-US"/>
           </a:p>
@@ -2641,7 +2641,7 @@
           <a:p>
             <a:fld id="{E9CC885B-4903-4D54-9A93-00025F12DED9}" type="datetimeFigureOut">
               <a:rPr kumimoji="1" lang="ja-JP" altLang="en-US" smtClean="0"/>
-              <a:t>2025/7/28</a:t>
+              <a:t>2025/9/8</a:t>
             </a:fld>
             <a:endParaRPr kumimoji="1" lang="ja-JP" altLang="en-US"/>
           </a:p>
@@ -2929,7 +2929,7 @@
           <a:p>
             <a:fld id="{E9CC885B-4903-4D54-9A93-00025F12DED9}" type="datetimeFigureOut">
               <a:rPr kumimoji="1" lang="ja-JP" altLang="en-US" smtClean="0"/>
-              <a:t>2025/7/28</a:t>
+              <a:t>2025/9/8</a:t>
             </a:fld>
             <a:endParaRPr kumimoji="1" lang="ja-JP" altLang="en-US"/>
           </a:p>
@@ -3202,7 +3202,7 @@
           <a:p>
             <a:fld id="{E9CC885B-4903-4D54-9A93-00025F12DED9}" type="datetimeFigureOut">
               <a:rPr kumimoji="1" lang="ja-JP" altLang="en-US" smtClean="0"/>
-              <a:t>2025/7/28</a:t>
+              <a:t>2025/9/8</a:t>
             </a:fld>
             <a:endParaRPr kumimoji="1" lang="ja-JP" altLang="en-US"/>
           </a:p>
@@ -4752,8 +4752,8 @@
           </a:p>
         </p:txBody>
       </p:sp>
-      <mc:AlternateContent xmlns:mc="http://schemas.openxmlformats.org/markup-compatibility/2006" xmlns:a14="http://schemas.microsoft.com/office/drawing/2010/main">
-        <mc:Choice Requires="a14">
+      <mc:AlternateContent xmlns:mc="http://schemas.openxmlformats.org/markup-compatibility/2006">
+        <mc:Choice xmlns:a14="http://schemas.microsoft.com/office/drawing/2010/main" Requires="a14">
           <p:sp>
             <p:nvSpPr>
               <p:cNvPr id="6" name="テキスト ボックス 5">
@@ -4844,10 +4844,18 @@
               </a:p>
               <a:p>
                 <a:r>
-                  <a:rPr lang="ja-JP" altLang="en-US" sz="2400" dirty="0"/>
+                  <a:rPr lang="ja-JP" altLang="en-US" sz="2400" b="1" dirty="0">
+                    <a:solidFill>
+                      <a:srgbClr val="FF0000"/>
+                    </a:solidFill>
+                  </a:rPr>
                   <a:t>■解答</a:t>
                 </a:r>
-                <a:endParaRPr lang="en-US" altLang="ja-JP" sz="2400" dirty="0"/>
+                <a:endParaRPr lang="en-US" altLang="ja-JP" sz="2400" b="1" dirty="0">
+                  <a:solidFill>
+                    <a:srgbClr val="FF0000"/>
+                  </a:solidFill>
+                </a:endParaRPr>
               </a:p>
               <a:p>
                 <a14:m>
@@ -5028,7 +5036,7 @@
             </p:txBody>
           </p:sp>
         </mc:Choice>
-        <mc:Fallback xmlns="">
+        <mc:Fallback>
           <p:sp>
             <p:nvSpPr>
               <p:cNvPr id="6" name="テキスト ボックス 5">
